--- a/docs/AHMF_Platform_Overview.pptx
+++ b/docs/AHMF_Platform_Overview.pptx
@@ -3513,7 +3513,7 @@
         <p:spPr>
           <a:xfrm>
             <a:off x="6217920" y="1188720"/>
-            <a:ext cx="5303520" cy="5162989"/>
+            <a:ext cx="5303520" cy="3729038"/>
           </a:xfrm>
           <a:prstGeom prst="rect">
             <a:avLst/>
@@ -3818,7 +3818,7 @@
         <p:spPr>
           <a:xfrm>
             <a:off x="6217920" y="1188720"/>
-            <a:ext cx="5303520" cy="5162989"/>
+            <a:ext cx="5303520" cy="3729038"/>
           </a:xfrm>
           <a:prstGeom prst="rect">
             <a:avLst/>
@@ -4482,7 +4482,7 @@
         <p:spPr>
           <a:xfrm>
             <a:off x="6217920" y="1188720"/>
-            <a:ext cx="5303520" cy="5162989"/>
+            <a:ext cx="5303520" cy="3729038"/>
           </a:xfrm>
           <a:prstGeom prst="rect">
             <a:avLst/>
@@ -5473,7 +5473,7 @@
         <p:spPr>
           <a:xfrm>
             <a:off x="6217920" y="1188720"/>
-            <a:ext cx="5303520" cy="5162989"/>
+            <a:ext cx="5303520" cy="3729038"/>
           </a:xfrm>
           <a:prstGeom prst="rect">
             <a:avLst/>
@@ -5790,7 +5790,7 @@
         <p:spPr>
           <a:xfrm>
             <a:off x="6217920" y="1188720"/>
-            <a:ext cx="5303520" cy="5162989"/>
+            <a:ext cx="5303520" cy="3729038"/>
           </a:xfrm>
           <a:prstGeom prst="rect">
             <a:avLst/>
@@ -6065,7 +6065,7 @@
         <p:spPr>
           <a:xfrm>
             <a:off x="6217920" y="1188720"/>
-            <a:ext cx="5303520" cy="5162989"/>
+            <a:ext cx="5303520" cy="3729038"/>
           </a:xfrm>
           <a:prstGeom prst="rect">
             <a:avLst/>
@@ -6355,7 +6355,7 @@
         <p:spPr>
           <a:xfrm>
             <a:off x="6217920" y="1188720"/>
-            <a:ext cx="5303520" cy="5162989"/>
+            <a:ext cx="5303520" cy="3729038"/>
           </a:xfrm>
           <a:prstGeom prst="rect">
             <a:avLst/>
@@ -6687,7 +6687,7 @@
         <p:spPr>
           <a:xfrm>
             <a:off x="6217920" y="1188720"/>
-            <a:ext cx="5303520" cy="5162989"/>
+            <a:ext cx="5303520" cy="3729038"/>
           </a:xfrm>
           <a:prstGeom prst="rect">
             <a:avLst/>
@@ -7034,7 +7034,7 @@
         <p:spPr>
           <a:xfrm>
             <a:off x="6217920" y="1188720"/>
-            <a:ext cx="5303520" cy="5162989"/>
+            <a:ext cx="5303520" cy="3729038"/>
           </a:xfrm>
           <a:prstGeom prst="rect">
             <a:avLst/>
@@ -7339,7 +7339,7 @@
         <p:spPr>
           <a:xfrm>
             <a:off x="6217920" y="1188720"/>
-            <a:ext cx="5303520" cy="5162989"/>
+            <a:ext cx="5303520" cy="3729038"/>
           </a:xfrm>
           <a:prstGeom prst="rect">
             <a:avLst/>
